--- a/Modon Weekly Progress Report Construction Projects.pptx
+++ b/Modon Weekly Progress Report Construction Projects.pptx
@@ -532,7 +532,7 @@
           <c:smooth val="0"/>
           <c:extLst>
             <c:ext xmlns:c16="http://schemas.microsoft.com/office/drawing/2014/chart" uri="{C3380CC4-5D6E-409C-BE32-E72D297353CC}">
-              <c16:uniqueId val="{00000000-EF7B-42E3-A07C-0BDD657AD6A1}"/>
+              <c16:uniqueId val="{00000000-9097-449B-909E-624FF9CBE90B}"/>
             </c:ext>
           </c:extLst>
         </c:ser>
@@ -655,7 +655,7 @@
               <c:extLst>
                 <c:ext xmlns:c15="http://schemas.microsoft.com/office/drawing/2012/chart" uri="{CE6537A1-D6FC-4f65-9D91-7224C49458BB}"/>
                 <c:ext xmlns:c16="http://schemas.microsoft.com/office/drawing/2014/chart" uri="{C3380CC4-5D6E-409C-BE32-E72D297353CC}">
-                  <c16:uniqueId val="{00000001-EF7B-42E3-A07C-0BDD657AD6A1}"/>
+                  <c16:uniqueId val="{00000001-9097-449B-909E-624FF9CBE90B}"/>
                 </c:ext>
               </c:extLst>
             </c:dLbl>
@@ -671,7 +671,7 @@
               <c:extLst>
                 <c:ext xmlns:c15="http://schemas.microsoft.com/office/drawing/2012/chart" uri="{CE6537A1-D6FC-4f65-9D91-7224C49458BB}"/>
                 <c:ext xmlns:c16="http://schemas.microsoft.com/office/drawing/2014/chart" uri="{C3380CC4-5D6E-409C-BE32-E72D297353CC}">
-                  <c16:uniqueId val="{00000002-EF7B-42E3-A07C-0BDD657AD6A1}"/>
+                  <c16:uniqueId val="{00000002-9097-449B-909E-624FF9CBE90B}"/>
                 </c:ext>
               </c:extLst>
             </c:dLbl>
@@ -687,7 +687,7 @@
               <c:extLst>
                 <c:ext xmlns:c15="http://schemas.microsoft.com/office/drawing/2012/chart" uri="{CE6537A1-D6FC-4f65-9D91-7224C49458BB}"/>
                 <c:ext xmlns:c16="http://schemas.microsoft.com/office/drawing/2014/chart" uri="{C3380CC4-5D6E-409C-BE32-E72D297353CC}">
-                  <c16:uniqueId val="{00000003-EF7B-42E3-A07C-0BDD657AD6A1}"/>
+                  <c16:uniqueId val="{00000003-9097-449B-909E-624FF9CBE90B}"/>
                 </c:ext>
               </c:extLst>
             </c:dLbl>
@@ -831,7 +831,7 @@
           <c:smooth val="0"/>
           <c:extLst>
             <c:ext xmlns:c16="http://schemas.microsoft.com/office/drawing/2014/chart" uri="{C3380CC4-5D6E-409C-BE32-E72D297353CC}">
-              <c16:uniqueId val="{00000004-EF7B-42E3-A07C-0BDD657AD6A1}"/>
+              <c16:uniqueId val="{00000004-9097-449B-909E-624FF9CBE90B}"/>
             </c:ext>
           </c:extLst>
         </c:ser>
@@ -958,7 +958,7 @@
               <c:extLst>
                 <c:ext xmlns:c15="http://schemas.microsoft.com/office/drawing/2012/chart" uri="{CE6537A1-D6FC-4f65-9D91-7224C49458BB}"/>
                 <c:ext xmlns:c16="http://schemas.microsoft.com/office/drawing/2014/chart" uri="{C3380CC4-5D6E-409C-BE32-E72D297353CC}">
-                  <c16:uniqueId val="{00000005-EF7B-42E3-A07C-0BDD657AD6A1}"/>
+                  <c16:uniqueId val="{00000005-9097-449B-909E-624FF9CBE90B}"/>
                 </c:ext>
               </c:extLst>
             </c:dLbl>
@@ -1112,22 +1112,22 @@
                   <c:v>0.24032370022800434</c:v>
                 </c:pt>
                 <c:pt idx="5" formatCode="0.00%">
-                  <c:v>0.51999940279529078</c:v>
+                  <c:v>0.51982743790538732</c:v>
                 </c:pt>
                 <c:pt idx="6" formatCode="0.00%">
-                  <c:v>0.64670348925913657</c:v>
+                  <c:v>0.64583379323157508</c:v>
                 </c:pt>
                 <c:pt idx="7" formatCode="0.00%">
-                  <c:v>0.74791124455391289</c:v>
+                  <c:v>0.74617267326125047</c:v>
                 </c:pt>
                 <c:pt idx="8" formatCode="0.00%">
-                  <c:v>0.84132760122287176</c:v>
+                  <c:v>0.8390142591929115</c:v>
                 </c:pt>
                 <c:pt idx="9" formatCode="0.00%">
-                  <c:v>0.92334732742421333</c:v>
+                  <c:v>0.92082909847333116</c:v>
                 </c:pt>
                 <c:pt idx="10" formatCode="0.00%">
-                  <c:v>0.96986980582727222</c:v>
+                  <c:v>0.98173010707370634</c:v>
                 </c:pt>
               </c:numCache>
             </c:numRef>
@@ -1135,7 +1135,7 @@
           <c:smooth val="0"/>
           <c:extLst>
             <c:ext xmlns:c16="http://schemas.microsoft.com/office/drawing/2014/chart" uri="{C3380CC4-5D6E-409C-BE32-E72D297353CC}">
-              <c16:uniqueId val="{00000006-EF7B-42E3-A07C-0BDD657AD6A1}"/>
+              <c16:uniqueId val="{00000006-9097-449B-909E-624FF9CBE90B}"/>
             </c:ext>
           </c:extLst>
         </c:ser>
@@ -1204,7 +1204,7 @@
               <c:extLst>
                 <c:ext xmlns:c15="http://schemas.microsoft.com/office/drawing/2012/chart" uri="{CE6537A1-D6FC-4f65-9D91-7224C49458BB}"/>
                 <c:ext xmlns:c16="http://schemas.microsoft.com/office/drawing/2014/chart" uri="{C3380CC4-5D6E-409C-BE32-E72D297353CC}">
-                  <c16:uniqueId val="{00000007-EF7B-42E3-A07C-0BDD657AD6A1}"/>
+                  <c16:uniqueId val="{00000007-9097-449B-909E-624FF9CBE90B}"/>
                 </c:ext>
               </c:extLst>
             </c:dLbl>
@@ -1220,7 +1220,7 @@
               <c:extLst>
                 <c:ext xmlns:c15="http://schemas.microsoft.com/office/drawing/2012/chart" uri="{CE6537A1-D6FC-4f65-9D91-7224C49458BB}"/>
                 <c:ext xmlns:c16="http://schemas.microsoft.com/office/drawing/2014/chart" uri="{C3380CC4-5D6E-409C-BE32-E72D297353CC}">
-                  <c16:uniqueId val="{00000008-EF7B-42E3-A07C-0BDD657AD6A1}"/>
+                  <c16:uniqueId val="{00000008-9097-449B-909E-624FF9CBE90B}"/>
                 </c:ext>
               </c:extLst>
             </c:dLbl>
@@ -1388,7 +1388,7 @@
           <c:smooth val="0"/>
           <c:extLst>
             <c:ext xmlns:c16="http://schemas.microsoft.com/office/drawing/2014/chart" uri="{C3380CC4-5D6E-409C-BE32-E72D297353CC}">
-              <c16:uniqueId val="{00000009-EF7B-42E3-A07C-0BDD657AD6A1}"/>
+              <c16:uniqueId val="{00000009-9097-449B-909E-624FF9CBE90B}"/>
             </c:ext>
           </c:extLst>
         </c:ser>
@@ -1575,7 +1575,7 @@
           <c:smooth val="0"/>
           <c:extLst>
             <c:ext xmlns:c16="http://schemas.microsoft.com/office/drawing/2014/chart" uri="{C3380CC4-5D6E-409C-BE32-E72D297353CC}">
-              <c16:uniqueId val="{0000000A-EF7B-42E3-A07C-0BDD657AD6A1}"/>
+              <c16:uniqueId val="{0000000A-9097-449B-909E-624FF9CBE90B}"/>
             </c:ext>
           </c:extLst>
         </c:ser>
@@ -2098,7 +2098,7 @@
           <c:smooth val="0"/>
           <c:extLst>
             <c:ext xmlns:c16="http://schemas.microsoft.com/office/drawing/2014/chart" uri="{C3380CC4-5D6E-409C-BE32-E72D297353CC}">
-              <c16:uniqueId val="{00000000-CBB2-4E65-AE6D-443EB7B9D40E}"/>
+              <c16:uniqueId val="{00000000-BBCB-4EAA-9B6E-A9847E962E5C}"/>
             </c:ext>
           </c:extLst>
         </c:ser>
@@ -2221,7 +2221,7 @@
               <c:extLst>
                 <c:ext xmlns:c15="http://schemas.microsoft.com/office/drawing/2012/chart" uri="{CE6537A1-D6FC-4f65-9D91-7224C49458BB}"/>
                 <c:ext xmlns:c16="http://schemas.microsoft.com/office/drawing/2014/chart" uri="{C3380CC4-5D6E-409C-BE32-E72D297353CC}">
-                  <c16:uniqueId val="{00000001-CBB2-4E65-AE6D-443EB7B9D40E}"/>
+                  <c16:uniqueId val="{00000001-BBCB-4EAA-9B6E-A9847E962E5C}"/>
                 </c:ext>
               </c:extLst>
             </c:dLbl>
@@ -2237,7 +2237,7 @@
               <c:extLst>
                 <c:ext xmlns:c15="http://schemas.microsoft.com/office/drawing/2012/chart" uri="{CE6537A1-D6FC-4f65-9D91-7224C49458BB}"/>
                 <c:ext xmlns:c16="http://schemas.microsoft.com/office/drawing/2014/chart" uri="{C3380CC4-5D6E-409C-BE32-E72D297353CC}">
-                  <c16:uniqueId val="{00000002-CBB2-4E65-AE6D-443EB7B9D40E}"/>
+                  <c16:uniqueId val="{00000002-BBCB-4EAA-9B6E-A9847E962E5C}"/>
                 </c:ext>
               </c:extLst>
             </c:dLbl>
@@ -2253,7 +2253,7 @@
               <c:extLst>
                 <c:ext xmlns:c15="http://schemas.microsoft.com/office/drawing/2012/chart" uri="{CE6537A1-D6FC-4f65-9D91-7224C49458BB}"/>
                 <c:ext xmlns:c16="http://schemas.microsoft.com/office/drawing/2014/chart" uri="{C3380CC4-5D6E-409C-BE32-E72D297353CC}">
-                  <c16:uniqueId val="{00000003-CBB2-4E65-AE6D-443EB7B9D40E}"/>
+                  <c16:uniqueId val="{00000003-BBCB-4EAA-9B6E-A9847E962E5C}"/>
                 </c:ext>
               </c:extLst>
             </c:dLbl>
@@ -2388,7 +2388,7 @@
           <c:smooth val="0"/>
           <c:extLst>
             <c:ext xmlns:c16="http://schemas.microsoft.com/office/drawing/2014/chart" uri="{C3380CC4-5D6E-409C-BE32-E72D297353CC}">
-              <c16:uniqueId val="{00000004-CBB2-4E65-AE6D-443EB7B9D40E}"/>
+              <c16:uniqueId val="{00000004-BBCB-4EAA-9B6E-A9847E962E5C}"/>
             </c:ext>
           </c:extLst>
         </c:ser>
@@ -2515,7 +2515,7 @@
               <c:extLst>
                 <c:ext xmlns:c15="http://schemas.microsoft.com/office/drawing/2012/chart" uri="{CE6537A1-D6FC-4f65-9D91-7224C49458BB}"/>
                 <c:ext xmlns:c16="http://schemas.microsoft.com/office/drawing/2014/chart" uri="{C3380CC4-5D6E-409C-BE32-E72D297353CC}">
-                  <c16:uniqueId val="{00000005-CBB2-4E65-AE6D-443EB7B9D40E}"/>
+                  <c16:uniqueId val="{00000005-BBCB-4EAA-9B6E-A9847E962E5C}"/>
                 </c:ext>
               </c:extLst>
             </c:dLbl>
@@ -2663,22 +2663,22 @@
                   <c:v>0.33445671676410993</c:v>
                 </c:pt>
                 <c:pt idx="5" formatCode="0.00%">
-                  <c:v>0.48612712425212001</c:v>
+                  <c:v>0.486106657752369</c:v>
                 </c:pt>
                 <c:pt idx="6" formatCode="0.00%">
-                  <c:v>0.57402391851604229</c:v>
+                  <c:v>0.57381925351853247</c:v>
                 </c:pt>
                 <c:pt idx="7" formatCode="0.00%">
-                  <c:v>0.65992864013753483</c:v>
+                  <c:v>0.65951931014251508</c:v>
                 </c:pt>
                 <c:pt idx="8" formatCode="0.00%">
-                  <c:v>0.78472653345249388</c:v>
+                  <c:v>0.78394880646195619</c:v>
                 </c:pt>
                 <c:pt idx="9" formatCode="0.00%">
-                  <c:v>0.90294785818080103</c:v>
+                  <c:v>0.90238844052094069</c:v>
                 </c:pt>
                 <c:pt idx="10" formatCode="0.00%">
-                  <c:v>0.96073160914443212</c:v>
+                  <c:v>0.98015431740812242</c:v>
                 </c:pt>
               </c:numCache>
             </c:numRef>
@@ -2686,7 +2686,7 @@
           <c:smooth val="0"/>
           <c:extLst>
             <c:ext xmlns:c16="http://schemas.microsoft.com/office/drawing/2014/chart" uri="{C3380CC4-5D6E-409C-BE32-E72D297353CC}">
-              <c16:uniqueId val="{00000006-CBB2-4E65-AE6D-443EB7B9D40E}"/>
+              <c16:uniqueId val="{00000006-BBCB-4EAA-9B6E-A9847E962E5C}"/>
             </c:ext>
           </c:extLst>
         </c:ser>
@@ -2821,7 +2821,7 @@
                   <c:v>0.7428043197958808</c:v>
                 </c:pt>
                 <c:pt idx="10">
-                  <c:v>0.82707172143729402</c:v>
+                  <c:v>0.82619166194800142</c:v>
                 </c:pt>
                 <c:pt idx="11">
                   <c:v>0.86988763891636711</c:v>
@@ -2844,7 +2844,7 @@
           <c:smooth val="0"/>
           <c:extLst>
             <c:ext xmlns:c16="http://schemas.microsoft.com/office/drawing/2014/chart" uri="{C3380CC4-5D6E-409C-BE32-E72D297353CC}">
-              <c16:uniqueId val="{00000007-CBB2-4E65-AE6D-443EB7B9D40E}"/>
+              <c16:uniqueId val="{00000007-BBCB-4EAA-9B6E-A9847E962E5C}"/>
             </c:ext>
           </c:extLst>
         </c:ser>
@@ -3281,7 +3281,7 @@
           </c:val>
           <c:extLst>
             <c:ext xmlns:c16="http://schemas.microsoft.com/office/drawing/2014/chart" uri="{C3380CC4-5D6E-409C-BE32-E72D297353CC}">
-              <c16:uniqueId val="{00000000-6379-45FD-B2F0-A42CE9E81FFE}"/>
+              <c16:uniqueId val="{00000000-DD8E-480A-B7D6-68A0A5D16599}"/>
             </c:ext>
           </c:extLst>
         </c:ser>
@@ -3418,14 +3418,14 @@
                   <c:v>63</c:v>
                 </c:pt>
                 <c:pt idx="20">
-                  <c:v>64</c:v>
+                  <c:v>58</c:v>
                 </c:pt>
               </c:numCache>
             </c:numRef>
           </c:val>
           <c:extLst>
             <c:ext xmlns:c16="http://schemas.microsoft.com/office/drawing/2014/chart" uri="{C3380CC4-5D6E-409C-BE32-E72D297353CC}">
-              <c16:uniqueId val="{00000001-6379-45FD-B2F0-A42CE9E81FFE}"/>
+              <c16:uniqueId val="{00000001-DD8E-480A-B7D6-68A0A5D16599}"/>
             </c:ext>
           </c:extLst>
         </c:ser>
@@ -3569,7 +3569,7 @@
           </c:val>
           <c:extLst>
             <c:ext xmlns:c16="http://schemas.microsoft.com/office/drawing/2014/chart" uri="{C3380CC4-5D6E-409C-BE32-E72D297353CC}">
-              <c16:uniqueId val="{00000002-6379-45FD-B2F0-A42CE9E81FFE}"/>
+              <c16:uniqueId val="{00000002-DD8E-480A-B7D6-68A0A5D16599}"/>
             </c:ext>
           </c:extLst>
         </c:ser>
@@ -3981,7 +3981,7 @@
           </c:val>
           <c:extLst>
             <c:ext xmlns:c16="http://schemas.microsoft.com/office/drawing/2014/chart" uri="{C3380CC4-5D6E-409C-BE32-E72D297353CC}">
-              <c16:uniqueId val="{00000000-BE28-4FB1-89E9-DFBE7AA61939}"/>
+              <c16:uniqueId val="{00000000-5218-422D-B697-E832EF9F0AF4}"/>
             </c:ext>
           </c:extLst>
         </c:ser>
@@ -4124,7 +4124,7 @@
           </c:val>
           <c:extLst>
             <c:ext xmlns:c16="http://schemas.microsoft.com/office/drawing/2014/chart" uri="{C3380CC4-5D6E-409C-BE32-E72D297353CC}">
-              <c16:uniqueId val="{00000001-BE28-4FB1-89E9-DFBE7AA61939}"/>
+              <c16:uniqueId val="{00000001-5218-422D-B697-E832EF9F0AF4}"/>
             </c:ext>
           </c:extLst>
         </c:ser>
@@ -4252,7 +4252,7 @@
           </c:val>
           <c:extLst>
             <c:ext xmlns:c16="http://schemas.microsoft.com/office/drawing/2014/chart" uri="{C3380CC4-5D6E-409C-BE32-E72D297353CC}">
-              <c16:uniqueId val="{00000002-BE28-4FB1-89E9-DFBE7AA61939}"/>
+              <c16:uniqueId val="{00000002-5218-422D-B697-E832EF9F0AF4}"/>
             </c:ext>
           </c:extLst>
         </c:ser>
@@ -6952,7 +6952,7 @@
               <a:cs typeface="Calibri"/>
             </a:rPr>
             <a:pPr algn="ctr"/>
-            <a:t>97.66%</a:t>
+            <a:t>99.55%</a:t>
           </a:fld>
           <a:endParaRPr lang="en-US" sz="1100" b="1">
             <a:solidFill>
@@ -7118,7 +7118,7 @@
               <a:cs typeface="Calibri"/>
             </a:rPr>
             <a:pPr algn="ctr"/>
-            <a:t>96.99%</a:t>
+            <a:t>98.17%</a:t>
           </a:fld>
           <a:endParaRPr lang="en-US" sz="1100" b="1">
             <a:solidFill>
@@ -7284,7 +7284,7 @@
               <a:cs typeface="Calibri"/>
             </a:rPr>
             <a:pPr algn="ctr"/>
-            <a:t>-0.67%</a:t>
+            <a:t>-1.37%</a:t>
           </a:fld>
           <a:endParaRPr lang="en-US" sz="1100" b="1">
             <a:solidFill>
@@ -7638,7 +7638,7 @@
               <a:cs typeface="+mn-cs"/>
             </a:rPr>
             <a:pPr marL="0" indent="0" algn="ctr"/>
-            <a:t>98.77%</a:t>
+            <a:t>99.72%</a:t>
           </a:fld>
           <a:endParaRPr lang="en-US" sz="1100" b="1" i="0" u="none" strike="noStrike">
             <a:solidFill>
@@ -7807,7 +7807,7 @@
               <a:cs typeface="+mn-cs"/>
             </a:rPr>
             <a:pPr marL="0" indent="0" algn="ctr"/>
-            <a:t>96.07%</a:t>
+            <a:t>98.02%</a:t>
           </a:fld>
           <a:endParaRPr lang="en-US" sz="1100" b="1" i="0" u="none" strike="noStrike">
             <a:solidFill>
@@ -7976,7 +7976,7 @@
               <a:cs typeface="+mn-cs"/>
             </a:rPr>
             <a:pPr marL="0" indent="0" algn="ctr"/>
-            <a:t>-2.69%</a:t>
+            <a:t>-1.70%</a:t>
           </a:fld>
           <a:endParaRPr lang="en-US" sz="1100" b="1" i="0" u="none" strike="noStrike">
             <a:solidFill>
@@ -8075,7 +8075,7 @@
           <a:p>
             <a:fld id="{DE8EFBDC-07CF-4AB5-A7A8-8935FC7B56ED}" type="datetimeFigureOut">
               <a:rPr lang="en-US" smtClean="0"/>
-              <a:t>9/15/2026</a:t>
+              <a:t>9/22/2026</a:t>
             </a:fld>
             <a:endParaRPr lang="en-US"/>
           </a:p>
@@ -9655,7 +9655,7 @@
             <a:fld id="{0A475379-0658-406F-B73E-526C51D4D8EF}" type="datetimeFigureOut">
               <a:rPr lang="en-US" smtClean="0"/>
               <a:pPr/>
-              <a:t>9/15/2026</a:t>
+              <a:t>9/22/2026</a:t>
             </a:fld>
             <a:endParaRPr lang="en-US"/>
           </a:p>
@@ -10384,7 +10384,7 @@
                 </a:solidFill>
                 <a:latin typeface="Gotham" panose="02000504050000020004" pitchFamily="2" charset="0"/>
               </a:rPr>
-              <a:t>	29 Nov 2026</a:t>
+              <a:t>	29 Oct 2026</a:t>
             </a:r>
           </a:p>
           <a:p>
@@ -10404,7 +10404,7 @@
                 </a:solidFill>
                 <a:latin typeface="Gotham" panose="02000504050000020004" pitchFamily="2" charset="0"/>
               </a:rPr>
-              <a:t>		28 Dec</a:t>
+              <a:t>		07 Nov</a:t>
             </a:r>
             <a:r>
               <a:rPr lang="en-US" altLang="en-US" sz="1200" dirty="0">
@@ -10439,17 +10439,17 @@
                 </a:solidFill>
                 <a:latin typeface="Gotham" panose="02000504050000020004" pitchFamily="2" charset="0"/>
               </a:rPr>
-              <a:t>			93</a:t>
+              <a:t>			42</a:t>
             </a:r>
           </a:p>
         </p:txBody>
       </p:sp>
       <p:pic>
         <p:nvPicPr>
-          <p:cNvPr id="4" name="Picture 3">
+          <p:cNvPr id="5" name="Picture 4">
             <a:extLst>
               <a:ext uri="{FF2B5EF4-FFF2-40B4-BE49-F238E27FC236}">
-                <a16:creationId xmlns:a16="http://schemas.microsoft.com/office/drawing/2014/main" id="{BE2BC6B0-B7FE-CCFE-EB8E-2AF4D23AEA69}"/>
+                <a16:creationId xmlns:a16="http://schemas.microsoft.com/office/drawing/2014/main" id="{5E78A680-9F93-91A1-ED02-BD79B8E50518}"/>
               </a:ext>
             </a:extLst>
           </p:cNvPr>
@@ -10466,7 +10466,7 @@
         </p:blipFill>
         <p:spPr>
           <a:xfrm>
-            <a:off x="3063759" y="1374698"/>
+            <a:off x="3309257" y="1473040"/>
             <a:ext cx="7924800" cy="3436620"/>
           </a:xfrm>
           <a:prstGeom prst="rect">
@@ -10719,7 +10719,7 @@
                 </a:solidFill>
                 <a:latin typeface="Gotham" panose="02000504050000020004" pitchFamily="2" charset="0"/>
               </a:rPr>
-              <a:t>Safety Plan approval:		15</a:t>
+              <a:t>Safety Plan approval:		22</a:t>
             </a:r>
             <a:r>
               <a:rPr lang="en-US" sz="1100" dirty="0">
@@ -10782,7 +10782,7 @@
                 </a:solidFill>
                 <a:latin typeface="Gotham" panose="02000504050000020004" pitchFamily="2" charset="0"/>
               </a:rPr>
-              <a:t>Risk Management Plan approval: 	15 Sep</a:t>
+              <a:t>Risk Management Plan approval: 	22 Sep</a:t>
             </a:r>
             <a:r>
               <a:rPr lang="en-US" sz="1100" dirty="0">
@@ -10974,7 +10974,7 @@
                 </a:solidFill>
                 <a:latin typeface="Gotham" panose="02000504050000020004" pitchFamily="2" charset="0"/>
               </a:rPr>
-              <a:t>                          15 Sep 2026</a:t>
+              <a:t>                          22 Sep 2026</a:t>
             </a:r>
           </a:p>
           <a:p>
@@ -10992,10 +10992,10 @@
       </p:sp>
       <p:pic>
         <p:nvPicPr>
-          <p:cNvPr id="5" name="Picture 4">
+          <p:cNvPr id="4" name="Picture 3">
             <a:extLst>
               <a:ext uri="{FF2B5EF4-FFF2-40B4-BE49-F238E27FC236}">
-                <a16:creationId xmlns:a16="http://schemas.microsoft.com/office/drawing/2014/main" id="{AD76CBB7-D69D-64E5-31E2-E43079F20734}"/>
+                <a16:creationId xmlns:a16="http://schemas.microsoft.com/office/drawing/2014/main" id="{D24943DB-F096-CBDA-6020-8D215E301CCB}"/>
               </a:ext>
             </a:extLst>
           </p:cNvPr>
@@ -11012,7 +11012,7 @@
         </p:blipFill>
         <p:spPr>
           <a:xfrm>
-            <a:off x="5728996" y="1218912"/>
+            <a:off x="5504016" y="1341077"/>
             <a:ext cx="4876800" cy="5082540"/>
           </a:xfrm>
           <a:prstGeom prst="rect">
@@ -11560,10 +11560,10 @@
       </p:sp>
       <p:pic>
         <p:nvPicPr>
-          <p:cNvPr id="5" name="Picture 4">
+          <p:cNvPr id="7" name="Picture 6">
             <a:extLst>
               <a:ext uri="{FF2B5EF4-FFF2-40B4-BE49-F238E27FC236}">
-                <a16:creationId xmlns:a16="http://schemas.microsoft.com/office/drawing/2014/main" id="{9F07CDD9-0127-C3CA-9405-4FDAB5D542A4}"/>
+                <a16:creationId xmlns:a16="http://schemas.microsoft.com/office/drawing/2014/main" id="{9398CA9C-6CE0-369A-9798-C4D6BCD0C60C}"/>
               </a:ext>
             </a:extLst>
           </p:cNvPr>
@@ -11580,8 +11580,8 @@
         </p:blipFill>
         <p:spPr>
           <a:xfrm>
-            <a:off x="404984" y="1364920"/>
-            <a:ext cx="8735906" cy="3560386"/>
+            <a:off x="332232" y="1320638"/>
+            <a:ext cx="9205769" cy="3560386"/>
           </a:xfrm>
           <a:prstGeom prst="rect">
             <a:avLst/>
@@ -12146,10 +12146,10 @@
       </p:sp>
       <p:pic>
         <p:nvPicPr>
-          <p:cNvPr id="4" name="Picture 3">
+          <p:cNvPr id="5" name="Picture 4">
             <a:extLst>
               <a:ext uri="{FF2B5EF4-FFF2-40B4-BE49-F238E27FC236}">
-                <a16:creationId xmlns:a16="http://schemas.microsoft.com/office/drawing/2014/main" id="{4ED16B4D-0999-1446-9CB0-A6C6E506C480}"/>
+                <a16:creationId xmlns:a16="http://schemas.microsoft.com/office/drawing/2014/main" id="{6A93CF17-68CC-4313-F0B7-EF0EE9C11011}"/>
               </a:ext>
             </a:extLst>
           </p:cNvPr>
@@ -12166,8 +12166,8 @@
         </p:blipFill>
         <p:spPr>
           <a:xfrm>
-            <a:off x="3187980" y="1391027"/>
-            <a:ext cx="6164580" cy="3567015"/>
+            <a:off x="3013710" y="1238250"/>
+            <a:ext cx="6886070" cy="3697644"/>
           </a:xfrm>
           <a:prstGeom prst="rect">
             <a:avLst/>
@@ -12699,7 +12699,7 @@
       </p:sp>
       <p:graphicFrame>
         <p:nvGraphicFramePr>
-          <p:cNvPr id="4" name="Chart 3">
+          <p:cNvPr id="3" name="Chart 2">
             <a:extLst>
               <a:ext uri="{FF2B5EF4-FFF2-40B4-BE49-F238E27FC236}">
                 <a16:creationId xmlns:a16="http://schemas.microsoft.com/office/drawing/2014/main" id="{AC84F2B3-7BC6-4B72-9229-73385856D10E}"/>
@@ -12712,14 +12712,14 @@
           <p:nvPr>
             <p:extLst>
               <p:ext uri="{D42A27DB-BD31-4B8C-83A1-F6EECF244321}">
-                <p14:modId xmlns:p14="http://schemas.microsoft.com/office/powerpoint/2010/main" val="1943515912"/>
+                <p14:modId xmlns:p14="http://schemas.microsoft.com/office/powerpoint/2010/main" val="2513068177"/>
               </p:ext>
             </p:extLst>
           </p:nvPr>
         </p:nvGraphicFramePr>
         <p:xfrm>
-          <a:off x="928062" y="1276358"/>
-          <a:ext cx="10335875" cy="4123812"/>
+          <a:off x="895739" y="1446245"/>
+          <a:ext cx="9953320" cy="3881535"/>
         </p:xfrm>
         <a:graphic>
           <a:graphicData uri="http://schemas.openxmlformats.org/drawingml/2006/chart">
@@ -13404,7 +13404,7 @@
       </p:sp>
       <p:graphicFrame>
         <p:nvGraphicFramePr>
-          <p:cNvPr id="3" name="Chart 2">
+          <p:cNvPr id="4" name="Chart 3">
             <a:extLst>
               <a:ext uri="{FF2B5EF4-FFF2-40B4-BE49-F238E27FC236}">
                 <a16:creationId xmlns:a16="http://schemas.microsoft.com/office/drawing/2014/main" id="{00000000-0008-0000-0000-000012000000}"/>
@@ -13417,14 +13417,14 @@
           <p:nvPr>
             <p:extLst>
               <p:ext uri="{D42A27DB-BD31-4B8C-83A1-F6EECF244321}">
-                <p14:modId xmlns:p14="http://schemas.microsoft.com/office/powerpoint/2010/main" val="4038233903"/>
+                <p14:modId xmlns:p14="http://schemas.microsoft.com/office/powerpoint/2010/main" val="101752015"/>
               </p:ext>
             </p:extLst>
           </p:nvPr>
         </p:nvGraphicFramePr>
         <p:xfrm>
-          <a:off x="702733" y="1399593"/>
-          <a:ext cx="10786534" cy="4030824"/>
+          <a:off x="702733" y="1539550"/>
+          <a:ext cx="10786534" cy="3806891"/>
         </p:xfrm>
         <a:graphic>
           <a:graphicData uri="http://schemas.openxmlformats.org/drawingml/2006/chart">
@@ -13602,10 +13602,10 @@
       </p:sp>
       <p:pic>
         <p:nvPicPr>
-          <p:cNvPr id="4" name="Picture 3">
+          <p:cNvPr id="5" name="Picture 4">
             <a:extLst>
               <a:ext uri="{FF2B5EF4-FFF2-40B4-BE49-F238E27FC236}">
-                <a16:creationId xmlns:a16="http://schemas.microsoft.com/office/drawing/2014/main" id="{C489ADAD-2735-1AF2-C48A-171F0A72FEA4}"/>
+                <a16:creationId xmlns:a16="http://schemas.microsoft.com/office/drawing/2014/main" id="{422AFFD8-B94E-C896-8700-C5A8562DD697}"/>
               </a:ext>
             </a:extLst>
           </p:cNvPr>
@@ -13622,8 +13622,8 @@
         </p:blipFill>
         <p:spPr>
           <a:xfrm>
-            <a:off x="6736702" y="1276357"/>
-            <a:ext cx="5049572" cy="4219374"/>
+            <a:off x="6095999" y="1392750"/>
+            <a:ext cx="5617915" cy="4252270"/>
           </a:xfrm>
           <a:prstGeom prst="rect">
             <a:avLst/>
@@ -15035,10 +15035,10 @@
       </p:sp>
       <p:pic>
         <p:nvPicPr>
-          <p:cNvPr id="4" name="Picture 3">
+          <p:cNvPr id="5" name="Picture 4">
             <a:extLst>
               <a:ext uri="{FF2B5EF4-FFF2-40B4-BE49-F238E27FC236}">
-                <a16:creationId xmlns:a16="http://schemas.microsoft.com/office/drawing/2014/main" id="{5E0AABF2-E3E4-6896-416A-499D94D1C165}"/>
+                <a16:creationId xmlns:a16="http://schemas.microsoft.com/office/drawing/2014/main" id="{76435ECD-8024-FA34-12E7-65E5C54C60EE}"/>
               </a:ext>
             </a:extLst>
           </p:cNvPr>
@@ -15055,7 +15055,7 @@
         </p:blipFill>
         <p:spPr>
           <a:xfrm>
-            <a:off x="2965580" y="1521504"/>
+            <a:off x="2890935" y="1513181"/>
             <a:ext cx="8686800" cy="1584960"/>
           </a:xfrm>
           <a:prstGeom prst="rect">
@@ -15299,10 +15299,10 @@
       </p:sp>
       <p:pic>
         <p:nvPicPr>
-          <p:cNvPr id="4" name="Picture 3">
+          <p:cNvPr id="5" name="Picture 4">
             <a:extLst>
               <a:ext uri="{FF2B5EF4-FFF2-40B4-BE49-F238E27FC236}">
-                <a16:creationId xmlns:a16="http://schemas.microsoft.com/office/drawing/2014/main" id="{FA6B2AAA-4489-7F73-3584-CE68CBD2C50B}"/>
+                <a16:creationId xmlns:a16="http://schemas.microsoft.com/office/drawing/2014/main" id="{5A6EB93B-3DF5-DE1A-3B74-87A42BE10C79}"/>
               </a:ext>
             </a:extLst>
           </p:cNvPr>
@@ -15320,7 +15320,7 @@
         <p:spPr>
           <a:xfrm>
             <a:off x="253365" y="4376738"/>
-            <a:ext cx="6118860" cy="2313622"/>
+            <a:ext cx="6118860" cy="2340818"/>
           </a:xfrm>
           <a:prstGeom prst="rect">
             <a:avLst/>
@@ -15329,10 +15329,10 @@
       </p:pic>
       <p:pic>
         <p:nvPicPr>
-          <p:cNvPr id="7" name="Picture 6">
+          <p:cNvPr id="9" name="Picture 8">
             <a:extLst>
               <a:ext uri="{FF2B5EF4-FFF2-40B4-BE49-F238E27FC236}">
-                <a16:creationId xmlns:a16="http://schemas.microsoft.com/office/drawing/2014/main" id="{2A5FD74A-0C9D-4791-780C-4E2D7DF79F82}"/>
+                <a16:creationId xmlns:a16="http://schemas.microsoft.com/office/drawing/2014/main" id="{EC675BBD-44A0-C76A-664B-60E3BE3F442D}"/>
               </a:ext>
             </a:extLst>
           </p:cNvPr>
@@ -15349,8 +15349,8 @@
         </p:blipFill>
         <p:spPr>
           <a:xfrm>
-            <a:off x="7016621" y="1352561"/>
-            <a:ext cx="4842378" cy="5206859"/>
+            <a:off x="6960638" y="1276357"/>
+            <a:ext cx="4777064" cy="5206859"/>
           </a:xfrm>
           <a:prstGeom prst="rect">
             <a:avLst/>
@@ -16004,10 +16004,10 @@
       </p:sp>
       <p:pic>
         <p:nvPicPr>
-          <p:cNvPr id="4" name="Picture 3">
+          <p:cNvPr id="5" name="Picture 4">
             <a:extLst>
               <a:ext uri="{FF2B5EF4-FFF2-40B4-BE49-F238E27FC236}">
-                <a16:creationId xmlns:a16="http://schemas.microsoft.com/office/drawing/2014/main" id="{EA760F0D-02CB-F7E6-DACB-9C8738A5B4AE}"/>
+                <a16:creationId xmlns:a16="http://schemas.microsoft.com/office/drawing/2014/main" id="{F07B77AB-165D-CA37-6A0E-E93E1A53DAA3}"/>
               </a:ext>
             </a:extLst>
           </p:cNvPr>
@@ -16024,8 +16024,8 @@
         </p:blipFill>
         <p:spPr>
           <a:xfrm>
-            <a:off x="7651102" y="1204816"/>
-            <a:ext cx="4540898" cy="4197608"/>
+            <a:off x="7231223" y="1276357"/>
+            <a:ext cx="4787981" cy="4000500"/>
           </a:xfrm>
           <a:prstGeom prst="rect">
             <a:avLst/>
@@ -16268,10 +16268,10 @@
       </p:sp>
       <p:pic>
         <p:nvPicPr>
-          <p:cNvPr id="4" name="Picture 3">
+          <p:cNvPr id="5" name="Picture 4">
             <a:extLst>
               <a:ext uri="{FF2B5EF4-FFF2-40B4-BE49-F238E27FC236}">
-                <a16:creationId xmlns:a16="http://schemas.microsoft.com/office/drawing/2014/main" id="{8DB77BC2-A539-1312-7F14-A7E8A5FD0082}"/>
+                <a16:creationId xmlns:a16="http://schemas.microsoft.com/office/drawing/2014/main" id="{A32B1B51-D77A-F1F0-5CE8-EB5B894C64A9}"/>
               </a:ext>
             </a:extLst>
           </p:cNvPr>
@@ -16288,8 +16288,8 @@
         </p:blipFill>
         <p:spPr>
           <a:xfrm>
-            <a:off x="163830" y="4372817"/>
-            <a:ext cx="6208395" cy="2031326"/>
+            <a:off x="285128" y="4352290"/>
+            <a:ext cx="6134795" cy="2031326"/>
           </a:xfrm>
           <a:prstGeom prst="rect">
             <a:avLst/>
@@ -16298,10 +16298,10 @@
       </p:pic>
       <p:pic>
         <p:nvPicPr>
-          <p:cNvPr id="8" name="Picture 7">
+          <p:cNvPr id="9" name="Picture 8">
             <a:extLst>
               <a:ext uri="{FF2B5EF4-FFF2-40B4-BE49-F238E27FC236}">
-                <a16:creationId xmlns:a16="http://schemas.microsoft.com/office/drawing/2014/main" id="{F4A0DB95-27B6-D6B1-6F15-7BB0FD7A7057}"/>
+                <a16:creationId xmlns:a16="http://schemas.microsoft.com/office/drawing/2014/main" id="{0E55ABCE-5B42-A38C-3D64-373D35F4284F}"/>
               </a:ext>
             </a:extLst>
           </p:cNvPr>
@@ -16318,8 +16318,8 @@
         </p:blipFill>
         <p:spPr>
           <a:xfrm>
-            <a:off x="7247908" y="1329974"/>
-            <a:ext cx="4675481" cy="5359664"/>
+            <a:off x="7231391" y="1343608"/>
+            <a:ext cx="4675481" cy="5514392"/>
           </a:xfrm>
           <a:prstGeom prst="rect">
             <a:avLst/>
@@ -17978,7 +17978,7 @@
       </p:sp>
       <p:graphicFrame>
         <p:nvGraphicFramePr>
-          <p:cNvPr id="4" name="Chart 3">
+          <p:cNvPr id="3" name="Chart 2">
             <a:extLst>
               <a:ext uri="{FF2B5EF4-FFF2-40B4-BE49-F238E27FC236}">
                 <a16:creationId xmlns:a16="http://schemas.microsoft.com/office/drawing/2014/main" id="{00000000-0008-0000-0A00-000002000000}"/>
@@ -17991,14 +17991,14 @@
           <p:nvPr>
             <p:extLst>
               <p:ext uri="{D42A27DB-BD31-4B8C-83A1-F6EECF244321}">
-                <p14:modId xmlns:p14="http://schemas.microsoft.com/office/powerpoint/2010/main" val="2353454112"/>
+                <p14:modId xmlns:p14="http://schemas.microsoft.com/office/powerpoint/2010/main" val="3688414595"/>
               </p:ext>
             </p:extLst>
           </p:nvPr>
         </p:nvGraphicFramePr>
         <p:xfrm>
-          <a:off x="6095999" y="1336964"/>
-          <a:ext cx="5575599" cy="2889803"/>
+          <a:off x="5962261" y="1336964"/>
+          <a:ext cx="5709338" cy="2684530"/>
         </p:xfrm>
         <a:graphic>
           <a:graphicData uri="http://schemas.openxmlformats.org/drawingml/2006/chart">
@@ -18008,7 +18008,7 @@
       </p:graphicFrame>
       <p:graphicFrame>
         <p:nvGraphicFramePr>
-          <p:cNvPr id="5" name="Chart 4">
+          <p:cNvPr id="6" name="Chart 5">
             <a:extLst>
               <a:ext uri="{FF2B5EF4-FFF2-40B4-BE49-F238E27FC236}">
                 <a16:creationId xmlns:a16="http://schemas.microsoft.com/office/drawing/2014/main" id="{00000000-0008-0000-0A00-000003000000}"/>
@@ -18021,14 +18021,14 @@
           <p:nvPr>
             <p:extLst>
               <p:ext uri="{D42A27DB-BD31-4B8C-83A1-F6EECF244321}">
-                <p14:modId xmlns:p14="http://schemas.microsoft.com/office/powerpoint/2010/main" val="3229607800"/>
+                <p14:modId xmlns:p14="http://schemas.microsoft.com/office/powerpoint/2010/main" val="759722897"/>
               </p:ext>
             </p:extLst>
           </p:nvPr>
         </p:nvGraphicFramePr>
         <p:xfrm>
-          <a:off x="6095999" y="4287374"/>
-          <a:ext cx="5575599" cy="2300038"/>
+          <a:off x="5962261" y="4082101"/>
+          <a:ext cx="5635690" cy="2462213"/>
         </p:xfrm>
         <a:graphic>
           <a:graphicData uri="http://schemas.openxmlformats.org/drawingml/2006/chart">
@@ -18539,10 +18539,10 @@
       </p:sp>
       <p:pic>
         <p:nvPicPr>
-          <p:cNvPr id="4" name="Picture 3">
+          <p:cNvPr id="5" name="Picture 4">
             <a:extLst>
               <a:ext uri="{FF2B5EF4-FFF2-40B4-BE49-F238E27FC236}">
-                <a16:creationId xmlns:a16="http://schemas.microsoft.com/office/drawing/2014/main" id="{83D655C9-E1E0-BE04-48AC-764C739EC807}"/>
+                <a16:creationId xmlns:a16="http://schemas.microsoft.com/office/drawing/2014/main" id="{39973713-6388-FCC8-31DE-56442B791EA7}"/>
               </a:ext>
             </a:extLst>
           </p:cNvPr>
@@ -18559,7 +18559,7 @@
         </p:blipFill>
         <p:spPr>
           <a:xfrm>
-            <a:off x="511059" y="1645689"/>
+            <a:off x="623183" y="1726423"/>
             <a:ext cx="10477500" cy="1935480"/>
           </a:xfrm>
           <a:prstGeom prst="rect">
@@ -19201,10 +19201,10 @@
       </p:sp>
       <p:pic>
         <p:nvPicPr>
-          <p:cNvPr id="4" name="Picture 3">
+          <p:cNvPr id="5" name="Picture 4">
             <a:extLst>
               <a:ext uri="{FF2B5EF4-FFF2-40B4-BE49-F238E27FC236}">
-                <a16:creationId xmlns:a16="http://schemas.microsoft.com/office/drawing/2014/main" id="{6D9E9F20-C235-19AF-4AF9-0C1AE7801FA3}"/>
+                <a16:creationId xmlns:a16="http://schemas.microsoft.com/office/drawing/2014/main" id="{1FD14263-9908-BE04-B5BD-939A7D43F0BE}"/>
               </a:ext>
             </a:extLst>
           </p:cNvPr>
@@ -19221,8 +19221,8 @@
         </p:blipFill>
         <p:spPr>
           <a:xfrm>
-            <a:off x="571674" y="1265904"/>
-            <a:ext cx="11048652" cy="2163096"/>
+            <a:off x="559837" y="1458767"/>
+            <a:ext cx="10711543" cy="2110179"/>
           </a:xfrm>
           <a:prstGeom prst="rect">
             <a:avLst/>
@@ -20201,10 +20201,10 @@
       </p:sp>
       <p:pic>
         <p:nvPicPr>
-          <p:cNvPr id="5" name="Picture 4">
+          <p:cNvPr id="4" name="Picture 3">
             <a:extLst>
               <a:ext uri="{FF2B5EF4-FFF2-40B4-BE49-F238E27FC236}">
-                <a16:creationId xmlns:a16="http://schemas.microsoft.com/office/drawing/2014/main" id="{7EE2CE3C-796A-8C56-B83F-285434278212}"/>
+                <a16:creationId xmlns:a16="http://schemas.microsoft.com/office/drawing/2014/main" id="{FDCB6F7A-0FF5-EFBC-731F-E8472FB16EBC}"/>
               </a:ext>
             </a:extLst>
           </p:cNvPr>
@@ -20221,8 +20221,8 @@
         </p:blipFill>
         <p:spPr>
           <a:xfrm>
-            <a:off x="4605556" y="1343608"/>
-            <a:ext cx="7406506" cy="5383763"/>
+            <a:off x="4605556" y="1276357"/>
+            <a:ext cx="7322530" cy="5318449"/>
           </a:xfrm>
           <a:prstGeom prst="rect">
             <a:avLst/>
